--- a/index/designs/y8-l15/l4-first-then/l4-first-then.pptx
+++ b/index/designs/y8-l15/l4-first-then/l4-first-then.pptx
@@ -8420,8 +8420,8 @@
         </p:nvSpPr>
         <p:spPr>
           <a:xfrm>
-            <a:off x="507950" y="176213"/>
-            <a:ext cx="3398300" cy="180975"/>
+            <a:off x="507950" y="180975"/>
+            <a:ext cx="3043077" cy="171450"/>
           </a:xfrm>
           <a:prstGeom prst="rect">
             <a:avLst/>
@@ -8459,8 +8459,8 @@
         </p:nvSpPr>
         <p:spPr>
           <a:xfrm>
-            <a:off x="4125069" y="166688"/>
-            <a:ext cx="1864010" cy="200025"/>
+            <a:off x="3776811" y="166688"/>
+            <a:ext cx="1731788" cy="200025"/>
           </a:xfrm>
           <a:prstGeom prst="rect">
             <a:avLst/>
@@ -8498,8 +8498,8 @@
         </p:nvSpPr>
         <p:spPr>
           <a:xfrm>
-            <a:off x="11214348" y="176213"/>
-            <a:ext cx="479096" cy="180975"/>
+            <a:off x="11244709" y="180975"/>
+            <a:ext cx="448127" cy="171450"/>
           </a:xfrm>
           <a:prstGeom prst="rect">
             <a:avLst/>
@@ -8567,7 +8567,7 @@
         </p:nvSpPr>
         <p:spPr>
           <a:xfrm>
-            <a:off x="609600" y="2109936"/>
+            <a:off x="609600" y="2100411"/>
             <a:ext cx="11192256" cy="200025"/>
           </a:xfrm>
           <a:prstGeom prst="rect">
@@ -8606,12 +8606,12 @@
         </p:nvSpPr>
         <p:spPr>
           <a:xfrm>
-            <a:off x="609600" y="2411462"/>
-            <a:ext cx="3539133" cy="2006352"/>
+            <a:off x="609600" y="2401937"/>
+            <a:ext cx="3539133" cy="2025402"/>
           </a:xfrm>
           <a:prstGeom prst="roundRect">
             <a:avLst>
-              <a:gd name="adj" fmla="val 5697"/>
+              <a:gd name="adj" fmla="val 5643"/>
             </a:avLst>
           </a:prstGeom>
           <a:solidFill>
@@ -8636,7 +8636,7 @@
       </p:sp>
       <p:pic>
         <p:nvPicPr>
-          <p:cNvPr id="10" name="Image 0" descr="/var/folders/6c/210dcgxn4gz5sm71vld2cy1h0000gn/T/tmp.LHO6BoqOp1/img/dianyingyuan.png">    </p:cNvPr>
+          <p:cNvPr id="10" name="Image 0" descr="/var/folders/6c/210dcgxn4gz5sm71vld2cy1h0000gn/T/tmp.kuKuqUEQz8/img/dianyingyuan.png">    </p:cNvPr>
           <p:cNvPicPr>
             <a:picLocks noChangeAspect="1"/>
           </p:cNvPicPr>
@@ -8650,7 +8650,7 @@
         </p:blipFill>
         <p:spPr>
           <a:xfrm>
-            <a:off x="1858417" y="2547938"/>
+            <a:off x="1858417" y="2538413"/>
             <a:ext cx="1041350" cy="1041350"/>
           </a:xfrm>
           <a:prstGeom prst="rect">
@@ -8666,8 +8666,8 @@
         </p:nvSpPr>
         <p:spPr>
           <a:xfrm>
-            <a:off x="1750516" y="3690789"/>
-            <a:ext cx="1282446" cy="590550"/>
+            <a:off x="1750516" y="3681264"/>
+            <a:ext cx="1282446" cy="609600"/>
           </a:xfrm>
           <a:prstGeom prst="rect">
             <a:avLst/>
@@ -8705,12 +8705,12 @@
         </p:nvSpPr>
         <p:spPr>
           <a:xfrm>
-            <a:off x="4326434" y="2411462"/>
-            <a:ext cx="3539133" cy="2006352"/>
+            <a:off x="4326434" y="2401937"/>
+            <a:ext cx="3539133" cy="2025402"/>
           </a:xfrm>
           <a:prstGeom prst="roundRect">
             <a:avLst>
-              <a:gd name="adj" fmla="val 5697"/>
+              <a:gd name="adj" fmla="val 5643"/>
             </a:avLst>
           </a:prstGeom>
           <a:solidFill>
@@ -8735,7 +8735,7 @@
       </p:sp>
       <p:pic>
         <p:nvPicPr>
-          <p:cNvPr id="13" name="Image 1" descr="/var/folders/6c/210dcgxn4gz5sm71vld2cy1h0000gn/T/tmp.LHO6BoqOp1/img/chuan.png">    </p:cNvPr>
+          <p:cNvPr id="13" name="Image 1" descr="/var/folders/6c/210dcgxn4gz5sm71vld2cy1h0000gn/T/tmp.kuKuqUEQz8/img/chuan.png">    </p:cNvPr>
           <p:cNvPicPr>
             <a:picLocks noChangeAspect="1"/>
           </p:cNvPicPr>
@@ -8749,7 +8749,7 @@
         </p:blipFill>
         <p:spPr>
           <a:xfrm>
-            <a:off x="5575250" y="2547938"/>
+            <a:off x="5575250" y="2538413"/>
             <a:ext cx="1041350" cy="1041350"/>
           </a:xfrm>
           <a:prstGeom prst="rect">
@@ -8765,8 +8765,8 @@
         </p:nvSpPr>
         <p:spPr>
           <a:xfrm>
-            <a:off x="5886450" y="3690789"/>
-            <a:ext cx="427482" cy="590550"/>
+            <a:off x="5886450" y="3681264"/>
+            <a:ext cx="427482" cy="609600"/>
           </a:xfrm>
           <a:prstGeom prst="rect">
             <a:avLst/>
@@ -8804,12 +8804,12 @@
         </p:nvSpPr>
         <p:spPr>
           <a:xfrm>
-            <a:off x="8043267" y="2411462"/>
-            <a:ext cx="3539133" cy="2006352"/>
+            <a:off x="8043267" y="2401937"/>
+            <a:ext cx="3539133" cy="2025402"/>
           </a:xfrm>
           <a:prstGeom prst="roundRect">
             <a:avLst>
-              <a:gd name="adj" fmla="val 5697"/>
+              <a:gd name="adj" fmla="val 5643"/>
             </a:avLst>
           </a:prstGeom>
           <a:solidFill>
@@ -8834,7 +8834,7 @@
       </p:sp>
       <p:pic>
         <p:nvPicPr>
-          <p:cNvPr id="16" name="Image 2" descr="/var/folders/6c/210dcgxn4gz5sm71vld2cy1h0000gn/T/tmp.LHO6BoqOp1/img/ranhou.png">    </p:cNvPr>
+          <p:cNvPr id="16" name="Image 2" descr="/var/folders/6c/210dcgxn4gz5sm71vld2cy1h0000gn/T/tmp.kuKuqUEQz8/img/ranhou.png">    </p:cNvPr>
           <p:cNvPicPr>
             <a:picLocks noChangeAspect="1"/>
           </p:cNvPicPr>
@@ -8848,7 +8848,7 @@
         </p:blipFill>
         <p:spPr>
           <a:xfrm>
-            <a:off x="9292084" y="2547938"/>
+            <a:off x="9292084" y="2538413"/>
             <a:ext cx="1041350" cy="1041350"/>
           </a:xfrm>
           <a:prstGeom prst="rect">
@@ -8864,8 +8864,8 @@
         </p:nvSpPr>
         <p:spPr>
           <a:xfrm>
-            <a:off x="9393734" y="3690789"/>
-            <a:ext cx="854964" cy="590550"/>
+            <a:off x="9393734" y="3681264"/>
+            <a:ext cx="854964" cy="609600"/>
           </a:xfrm>
           <a:prstGeom prst="rect">
             <a:avLst/>
@@ -8903,7 +8903,7 @@
         </p:nvSpPr>
         <p:spPr>
           <a:xfrm>
-            <a:off x="609600" y="4544764"/>
+            <a:off x="609600" y="4554289"/>
             <a:ext cx="11192256" cy="228600"/>
           </a:xfrm>
           <a:prstGeom prst="rect">
@@ -9213,7 +9213,7 @@
       </p:sp>
       <p:pic>
         <p:nvPicPr>
-          <p:cNvPr id="9" name="Image 0" descr="/var/folders/6c/210dcgxn4gz5sm71vld2cy1h0000gn/T/tmp.LHO6BoqOp1/img/ranhou.png">    </p:cNvPr>
+          <p:cNvPr id="9" name="Image 0" descr="/var/folders/6c/210dcgxn4gz5sm71vld2cy1h0000gn/T/tmp.kuKuqUEQz8/img/ranhou.png">    </p:cNvPr>
           <p:cNvPicPr>
             <a:picLocks noChangeAspect="1"/>
           </p:cNvPicPr>
@@ -11277,8 +11277,8 @@
         </p:nvSpPr>
         <p:spPr>
           <a:xfrm>
-            <a:off x="507950" y="180975"/>
-            <a:ext cx="3043077" cy="171450"/>
+            <a:off x="507950" y="176213"/>
+            <a:ext cx="3398300" cy="180975"/>
           </a:xfrm>
           <a:prstGeom prst="rect">
             <a:avLst/>
@@ -11316,8 +11316,8 @@
         </p:nvSpPr>
         <p:spPr>
           <a:xfrm>
-            <a:off x="3776811" y="166688"/>
-            <a:ext cx="1483587" cy="200025"/>
+            <a:off x="4125069" y="166688"/>
+            <a:ext cx="1643134" cy="200025"/>
           </a:xfrm>
           <a:prstGeom prst="rect">
             <a:avLst/>
@@ -11355,8 +11355,8 @@
         </p:nvSpPr>
         <p:spPr>
           <a:xfrm>
-            <a:off x="11244709" y="180975"/>
-            <a:ext cx="448127" cy="171450"/>
+            <a:off x="11184285" y="176213"/>
+            <a:ext cx="509760" cy="180975"/>
           </a:xfrm>
           <a:prstGeom prst="rect">
             <a:avLst/>
@@ -11424,7 +11424,7 @@
         </p:nvSpPr>
         <p:spPr>
           <a:xfrm>
-            <a:off x="609600" y="1432620"/>
+            <a:off x="609600" y="1427857"/>
             <a:ext cx="11192256" cy="200025"/>
           </a:xfrm>
           <a:prstGeom prst="rect">
@@ -11463,7 +11463,7 @@
         </p:nvSpPr>
         <p:spPr>
           <a:xfrm>
-            <a:off x="609600" y="1632645"/>
+            <a:off x="609600" y="1627882"/>
             <a:ext cx="10972800" cy="2404021"/>
           </a:xfrm>
           <a:prstGeom prst="roundRect">
@@ -11499,7 +11499,7 @@
         </p:nvSpPr>
         <p:spPr>
           <a:xfrm>
-            <a:off x="933450" y="1880295"/>
+            <a:off x="933450" y="1875532"/>
             <a:ext cx="10531602" cy="345430"/>
           </a:xfrm>
           <a:prstGeom prst="rect">
@@ -11563,7 +11563,7 @@
         </p:nvSpPr>
         <p:spPr>
           <a:xfrm>
-            <a:off x="933450" y="2225725"/>
+            <a:off x="933450" y="2220962"/>
             <a:ext cx="10531602" cy="345430"/>
           </a:xfrm>
           <a:prstGeom prst="rect">
@@ -11605,7 +11605,7 @@
         </p:nvSpPr>
         <p:spPr>
           <a:xfrm>
-            <a:off x="933450" y="2571155"/>
+            <a:off x="933450" y="2566392"/>
             <a:ext cx="10531602" cy="345430"/>
           </a:xfrm>
           <a:prstGeom prst="rect">
@@ -11647,7 +11647,7 @@
         </p:nvSpPr>
         <p:spPr>
           <a:xfrm>
-            <a:off x="933450" y="2916585"/>
+            <a:off x="933450" y="2911822"/>
             <a:ext cx="10531602" cy="345430"/>
           </a:xfrm>
           <a:prstGeom prst="rect">
@@ -11689,7 +11689,7 @@
         </p:nvSpPr>
         <p:spPr>
           <a:xfrm>
-            <a:off x="933450" y="3388965"/>
+            <a:off x="933450" y="3384203"/>
             <a:ext cx="10531602" cy="400050"/>
           </a:xfrm>
           <a:prstGeom prst="rect">
@@ -11734,12 +11734,12 @@
         </p:nvSpPr>
         <p:spPr>
           <a:xfrm>
-            <a:off x="609600" y="4214366"/>
-            <a:ext cx="10972800" cy="1236464"/>
+            <a:off x="609600" y="4209604"/>
+            <a:ext cx="10972800" cy="1245989"/>
           </a:xfrm>
           <a:prstGeom prst="roundRect">
             <a:avLst>
-              <a:gd name="adj" fmla="val 5136"/>
+              <a:gd name="adj" fmla="val 5096"/>
             </a:avLst>
           </a:prstGeom>
           <a:solidFill>
@@ -11772,8 +11772,8 @@
         </p:nvSpPr>
         <p:spPr>
           <a:xfrm>
-            <a:off x="857250" y="4411117"/>
-            <a:ext cx="10687050" cy="190500"/>
+            <a:off x="857250" y="4406354"/>
+            <a:ext cx="10687050" cy="200025"/>
           </a:xfrm>
           <a:prstGeom prst="rect">
             <a:avLst/>
@@ -11814,7 +11814,7 @@
         </p:nvSpPr>
         <p:spPr>
           <a:xfrm>
-            <a:off x="857250" y="4665018"/>
+            <a:off x="857250" y="4669780"/>
             <a:ext cx="10687050" cy="589062"/>
           </a:xfrm>
           <a:prstGeom prst="rect">
@@ -13339,8 +13339,8 @@
         </p:nvSpPr>
         <p:spPr>
           <a:xfrm>
-            <a:off x="507950" y="180975"/>
-            <a:ext cx="3043077" cy="171450"/>
+            <a:off x="507950" y="176213"/>
+            <a:ext cx="3398300" cy="180975"/>
           </a:xfrm>
           <a:prstGeom prst="rect">
             <a:avLst/>
@@ -13378,8 +13378,8 @@
         </p:nvSpPr>
         <p:spPr>
           <a:xfrm>
-            <a:off x="3776811" y="166688"/>
-            <a:ext cx="682514" cy="200025"/>
+            <a:off x="4125069" y="166688"/>
+            <a:ext cx="755836" cy="200025"/>
           </a:xfrm>
           <a:prstGeom prst="rect">
             <a:avLst/>
@@ -13417,8 +13417,8 @@
         </p:nvSpPr>
         <p:spPr>
           <a:xfrm>
-            <a:off x="11244709" y="180975"/>
-            <a:ext cx="448127" cy="171450"/>
+            <a:off x="11183838" y="176213"/>
+            <a:ext cx="510216" cy="180975"/>
           </a:xfrm>
           <a:prstGeom prst="rect">
             <a:avLst/>
@@ -13486,7 +13486,7 @@
         </p:nvSpPr>
         <p:spPr>
           <a:xfrm>
-            <a:off x="609600" y="1087487"/>
+            <a:off x="609600" y="1106537"/>
             <a:ext cx="11192256" cy="200025"/>
           </a:xfrm>
           <a:prstGeom prst="rect">
@@ -13525,12 +13525,12 @@
         </p:nvSpPr>
         <p:spPr>
           <a:xfrm>
-            <a:off x="609600" y="1287512"/>
-            <a:ext cx="10972800" cy="971550"/>
+            <a:off x="609600" y="1306562"/>
+            <a:ext cx="10972800" cy="962025"/>
           </a:xfrm>
           <a:prstGeom prst="roundRect">
             <a:avLst>
-              <a:gd name="adj" fmla="val 6536"/>
+              <a:gd name="adj" fmla="val 6601"/>
             </a:avLst>
           </a:prstGeom>
           <a:solidFill>
@@ -13561,8 +13561,8 @@
         </p:nvSpPr>
         <p:spPr>
           <a:xfrm>
-            <a:off x="847725" y="1411337"/>
-            <a:ext cx="673557" cy="723900"/>
+            <a:off x="847725" y="1430387"/>
+            <a:ext cx="673557" cy="714375"/>
           </a:xfrm>
           <a:prstGeom prst="rect">
             <a:avLst/>
@@ -13600,8 +13600,8 @@
         </p:nvSpPr>
         <p:spPr>
           <a:xfrm>
-            <a:off x="1736675" y="1635175"/>
-            <a:ext cx="751281" cy="276225"/>
+            <a:off x="1736675" y="1654225"/>
+            <a:ext cx="751281" cy="266700"/>
           </a:xfrm>
           <a:prstGeom prst="rect">
             <a:avLst/>
@@ -13639,8 +13639,8 @@
         </p:nvSpPr>
         <p:spPr>
           <a:xfrm>
-            <a:off x="2701826" y="1635175"/>
-            <a:ext cx="3497580" cy="276225"/>
+            <a:off x="2701826" y="1654225"/>
+            <a:ext cx="3564070" cy="266700"/>
           </a:xfrm>
           <a:prstGeom prst="rect">
             <a:avLst/>
@@ -13678,7 +13678,7 @@
         </p:nvSpPr>
         <p:spPr>
           <a:xfrm>
-            <a:off x="9966424" y="1573262"/>
+            <a:off x="9966424" y="1587550"/>
             <a:ext cx="400050" cy="400050"/>
           </a:xfrm>
           <a:prstGeom prst="roundRect">
@@ -13714,7 +13714,7 @@
         </p:nvSpPr>
         <p:spPr>
           <a:xfrm>
-            <a:off x="10455325" y="1573262"/>
+            <a:off x="10455325" y="1587550"/>
             <a:ext cx="400050" cy="400050"/>
           </a:xfrm>
           <a:prstGeom prst="roundRect">
@@ -13750,7 +13750,7 @@
         </p:nvSpPr>
         <p:spPr>
           <a:xfrm>
-            <a:off x="10944225" y="1573262"/>
+            <a:off x="10944225" y="1587550"/>
             <a:ext cx="400050" cy="400050"/>
           </a:xfrm>
           <a:prstGeom prst="roundRect">
@@ -13786,12 +13786,12 @@
         </p:nvSpPr>
         <p:spPr>
           <a:xfrm>
-            <a:off x="609600" y="2347913"/>
-            <a:ext cx="10972800" cy="971550"/>
+            <a:off x="609600" y="2357438"/>
+            <a:ext cx="10972800" cy="962025"/>
           </a:xfrm>
           <a:prstGeom prst="roundRect">
             <a:avLst>
-              <a:gd name="adj" fmla="val 6536"/>
+              <a:gd name="adj" fmla="val 6601"/>
             </a:avLst>
           </a:prstGeom>
           <a:solidFill>
@@ -13822,8 +13822,8 @@
         </p:nvSpPr>
         <p:spPr>
           <a:xfrm>
-            <a:off x="847725" y="2471738"/>
-            <a:ext cx="673557" cy="723900"/>
+            <a:off x="847725" y="2481263"/>
+            <a:ext cx="673557" cy="714375"/>
           </a:xfrm>
           <a:prstGeom prst="rect">
             <a:avLst/>
@@ -13861,8 +13861,8 @@
         </p:nvSpPr>
         <p:spPr>
           <a:xfrm>
-            <a:off x="1736675" y="2695575"/>
-            <a:ext cx="751281" cy="276225"/>
+            <a:off x="1736675" y="2705100"/>
+            <a:ext cx="751281" cy="266700"/>
           </a:xfrm>
           <a:prstGeom prst="rect">
             <a:avLst/>
@@ -13900,8 +13900,8 @@
         </p:nvSpPr>
         <p:spPr>
           <a:xfrm>
-            <a:off x="2701826" y="2695575"/>
-            <a:ext cx="3206115" cy="276225"/>
+            <a:off x="2701826" y="2705100"/>
+            <a:ext cx="3366117" cy="266700"/>
           </a:xfrm>
           <a:prstGeom prst="rect">
             <a:avLst/>
@@ -13939,7 +13939,7 @@
         </p:nvSpPr>
         <p:spPr>
           <a:xfrm>
-            <a:off x="9966424" y="2633663"/>
+            <a:off x="9966424" y="2638425"/>
             <a:ext cx="400050" cy="400050"/>
           </a:xfrm>
           <a:prstGeom prst="roundRect">
@@ -13975,7 +13975,7 @@
         </p:nvSpPr>
         <p:spPr>
           <a:xfrm>
-            <a:off x="10455325" y="2633663"/>
+            <a:off x="10455325" y="2638425"/>
             <a:ext cx="400050" cy="400050"/>
           </a:xfrm>
           <a:prstGeom prst="roundRect">
@@ -14011,7 +14011,7 @@
         </p:nvSpPr>
         <p:spPr>
           <a:xfrm>
-            <a:off x="10944225" y="2633663"/>
+            <a:off x="10944225" y="2638425"/>
             <a:ext cx="400050" cy="400050"/>
           </a:xfrm>
           <a:prstGeom prst="roundRect">
@@ -14048,11 +14048,11 @@
         <p:spPr>
           <a:xfrm>
             <a:off x="609600" y="3408313"/>
-            <a:ext cx="10972800" cy="971550"/>
+            <a:ext cx="10972800" cy="962025"/>
           </a:xfrm>
           <a:prstGeom prst="roundRect">
             <a:avLst>
-              <a:gd name="adj" fmla="val 6536"/>
+              <a:gd name="adj" fmla="val 6601"/>
             </a:avLst>
           </a:prstGeom>
           <a:solidFill>
@@ -14084,7 +14084,7 @@
         <p:spPr>
           <a:xfrm>
             <a:off x="847725" y="3532138"/>
-            <a:ext cx="673557" cy="723900"/>
+            <a:ext cx="673557" cy="714375"/>
           </a:xfrm>
           <a:prstGeom prst="rect">
             <a:avLst/>
@@ -14123,7 +14123,7 @@
         <p:spPr>
           <a:xfrm>
             <a:off x="1736675" y="3755975"/>
-            <a:ext cx="751281" cy="276225"/>
+            <a:ext cx="751281" cy="266700"/>
           </a:xfrm>
           <a:prstGeom prst="rect">
             <a:avLst/>
@@ -14162,7 +14162,7 @@
         <p:spPr>
           <a:xfrm>
             <a:off x="2701826" y="3755975"/>
-            <a:ext cx="2526030" cy="276225"/>
+            <a:ext cx="2772105" cy="266700"/>
           </a:xfrm>
           <a:prstGeom prst="rect">
             <a:avLst/>
@@ -14200,7 +14200,7 @@
         </p:nvSpPr>
         <p:spPr>
           <a:xfrm>
-            <a:off x="9966424" y="3694063"/>
+            <a:off x="9966424" y="3689300"/>
             <a:ext cx="400050" cy="400050"/>
           </a:xfrm>
           <a:prstGeom prst="roundRect">
@@ -14236,7 +14236,7 @@
         </p:nvSpPr>
         <p:spPr>
           <a:xfrm>
-            <a:off x="10455325" y="3694063"/>
+            <a:off x="10455325" y="3689300"/>
             <a:ext cx="400050" cy="400050"/>
           </a:xfrm>
           <a:prstGeom prst="roundRect">
@@ -14272,7 +14272,7 @@
         </p:nvSpPr>
         <p:spPr>
           <a:xfrm>
-            <a:off x="10944225" y="3694063"/>
+            <a:off x="10944225" y="3689300"/>
             <a:ext cx="400050" cy="400050"/>
           </a:xfrm>
           <a:prstGeom prst="roundRect">
@@ -14308,12 +14308,12 @@
         </p:nvSpPr>
         <p:spPr>
           <a:xfrm>
-            <a:off x="609600" y="4468713"/>
-            <a:ext cx="10972800" cy="971550"/>
+            <a:off x="609600" y="4459188"/>
+            <a:ext cx="10972800" cy="962025"/>
           </a:xfrm>
           <a:prstGeom prst="roundRect">
             <a:avLst>
-              <a:gd name="adj" fmla="val 6536"/>
+              <a:gd name="adj" fmla="val 6601"/>
             </a:avLst>
           </a:prstGeom>
           <a:solidFill>
@@ -14344,8 +14344,8 @@
         </p:nvSpPr>
         <p:spPr>
           <a:xfrm>
-            <a:off x="847725" y="4592538"/>
-            <a:ext cx="673557" cy="723900"/>
+            <a:off x="847725" y="4583013"/>
+            <a:ext cx="673557" cy="714375"/>
           </a:xfrm>
           <a:prstGeom prst="rect">
             <a:avLst/>
@@ -14383,8 +14383,8 @@
         </p:nvSpPr>
         <p:spPr>
           <a:xfrm>
-            <a:off x="1736675" y="4816376"/>
-            <a:ext cx="751281" cy="276225"/>
+            <a:off x="1736675" y="4806851"/>
+            <a:ext cx="751281" cy="266700"/>
           </a:xfrm>
           <a:prstGeom prst="rect">
             <a:avLst/>
@@ -14422,8 +14422,8 @@
         </p:nvSpPr>
         <p:spPr>
           <a:xfrm>
-            <a:off x="2701826" y="4816376"/>
-            <a:ext cx="1360170" cy="276225"/>
+            <a:off x="2701826" y="4806851"/>
+            <a:ext cx="1386129" cy="266700"/>
           </a:xfrm>
           <a:prstGeom prst="rect">
             <a:avLst/>
@@ -14461,7 +14461,7 @@
         </p:nvSpPr>
         <p:spPr>
           <a:xfrm>
-            <a:off x="9966424" y="4754463"/>
+            <a:off x="9966424" y="4740176"/>
             <a:ext cx="400050" cy="400050"/>
           </a:xfrm>
           <a:prstGeom prst="roundRect">
@@ -14497,7 +14497,7 @@
         </p:nvSpPr>
         <p:spPr>
           <a:xfrm>
-            <a:off x="10455325" y="4754463"/>
+            <a:off x="10455325" y="4740176"/>
             <a:ext cx="400050" cy="400050"/>
           </a:xfrm>
           <a:prstGeom prst="roundRect">
@@ -14533,7 +14533,7 @@
         </p:nvSpPr>
         <p:spPr>
           <a:xfrm>
-            <a:off x="10944225" y="4754463"/>
+            <a:off x="10944225" y="4740176"/>
             <a:ext cx="400050" cy="400050"/>
           </a:xfrm>
           <a:prstGeom prst="roundRect">
@@ -14569,7 +14569,7 @@
         </p:nvSpPr>
         <p:spPr>
           <a:xfrm>
-            <a:off x="609600" y="5567214"/>
+            <a:off x="609600" y="5548164"/>
             <a:ext cx="11192256" cy="228600"/>
           </a:xfrm>
           <a:prstGeom prst="rect">
@@ -15501,8 +15501,8 @@
         </p:nvSpPr>
         <p:spPr>
           <a:xfrm>
-            <a:off x="507950" y="180975"/>
-            <a:ext cx="1608826" cy="171450"/>
+            <a:off x="507950" y="176213"/>
+            <a:ext cx="1785830" cy="180975"/>
           </a:xfrm>
           <a:prstGeom prst="rect">
             <a:avLst/>
@@ -15540,8 +15540,8 @@
         </p:nvSpPr>
         <p:spPr>
           <a:xfrm>
-            <a:off x="2370683" y="166688"/>
-            <a:ext cx="1205633" cy="200025"/>
+            <a:off x="2544217" y="166688"/>
+            <a:ext cx="1324800" cy="200025"/>
           </a:xfrm>
           <a:prstGeom prst="rect">
             <a:avLst/>
@@ -15579,8 +15579,8 @@
         </p:nvSpPr>
         <p:spPr>
           <a:xfrm>
-            <a:off x="11244709" y="180975"/>
-            <a:ext cx="448127" cy="171450"/>
+            <a:off x="11183392" y="176213"/>
+            <a:ext cx="510671" cy="180975"/>
           </a:xfrm>
           <a:prstGeom prst="rect">
             <a:avLst/>
@@ -15648,7 +15648,7 @@
         </p:nvSpPr>
         <p:spPr>
           <a:xfrm>
-            <a:off x="609600" y="1766888"/>
+            <a:off x="609600" y="1762125"/>
             <a:ext cx="11192256" cy="200025"/>
           </a:xfrm>
           <a:prstGeom prst="rect">
@@ -15687,7 +15687,7 @@
         </p:nvSpPr>
         <p:spPr>
           <a:xfrm>
-            <a:off x="609600" y="1966912"/>
+            <a:off x="609600" y="1962150"/>
             <a:ext cx="10972800" cy="1179165"/>
           </a:xfrm>
           <a:prstGeom prst="roundRect">
@@ -15723,7 +15723,7 @@
         </p:nvSpPr>
         <p:spPr>
           <a:xfrm>
-            <a:off x="958751" y="2290763"/>
+            <a:off x="958751" y="2286000"/>
             <a:ext cx="10479988" cy="531465"/>
           </a:xfrm>
           <a:prstGeom prst="rect">
@@ -15765,7 +15765,7 @@
         </p:nvSpPr>
         <p:spPr>
           <a:xfrm>
-            <a:off x="609600" y="3298478"/>
+            <a:off x="609600" y="3293715"/>
             <a:ext cx="11192256" cy="342900"/>
           </a:xfrm>
           <a:prstGeom prst="rect">
@@ -15810,7 +15810,7 @@
         </p:nvSpPr>
         <p:spPr>
           <a:xfrm>
-            <a:off x="609600" y="3768328"/>
+            <a:off x="609600" y="3763566"/>
             <a:ext cx="11192256" cy="228600"/>
           </a:xfrm>
           <a:prstGeom prst="rect">
@@ -15866,12 +15866,12 @@
         </p:nvSpPr>
         <p:spPr>
           <a:xfrm>
-            <a:off x="609600" y="4174629"/>
-            <a:ext cx="10972800" cy="941933"/>
+            <a:off x="609600" y="4169866"/>
+            <a:ext cx="10972800" cy="951458"/>
           </a:xfrm>
           <a:prstGeom prst="roundRect">
             <a:avLst>
-              <a:gd name="adj" fmla="val 6741"/>
+              <a:gd name="adj" fmla="val 6674"/>
             </a:avLst>
           </a:prstGeom>
           <a:solidFill>
@@ -15904,8 +15904,8 @@
         </p:nvSpPr>
         <p:spPr>
           <a:xfrm>
-            <a:off x="857250" y="4371380"/>
-            <a:ext cx="10687050" cy="190500"/>
+            <a:off x="857250" y="4366617"/>
+            <a:ext cx="10687050" cy="200025"/>
           </a:xfrm>
           <a:prstGeom prst="rect">
             <a:avLst/>
@@ -15946,7 +15946,7 @@
         </p:nvSpPr>
         <p:spPr>
           <a:xfrm>
-            <a:off x="857250" y="4625280"/>
+            <a:off x="857250" y="4630043"/>
             <a:ext cx="10687050" cy="294531"/>
           </a:xfrm>
           <a:prstGeom prst="rect">
@@ -17714,7 +17714,7 @@
       </p:sp>
       <p:pic>
         <p:nvPicPr>
-          <p:cNvPr id="10" name="Image 0" descr="/var/folders/6c/210dcgxn4gz5sm71vld2cy1h0000gn/T/tmp.LHO6BoqOp1/img/dianyingyuan.png">    </p:cNvPr>
+          <p:cNvPr id="10" name="Image 0" descr="/var/folders/6c/210dcgxn4gz5sm71vld2cy1h0000gn/T/tmp.kuKuqUEQz8/img/dianyingyuan.png">    </p:cNvPr>
           <p:cNvPicPr>
             <a:picLocks noChangeAspect="1"/>
           </p:cNvPicPr>
@@ -17894,7 +17894,7 @@
       </p:sp>
       <p:pic>
         <p:nvPicPr>
-          <p:cNvPr id="15" name="Image 1" descr="/var/folders/6c/210dcgxn4gz5sm71vld2cy1h0000gn/T/tmp.LHO6BoqOp1/img/chuan.png">    </p:cNvPr>
+          <p:cNvPr id="15" name="Image 1" descr="/var/folders/6c/210dcgxn4gz5sm71vld2cy1h0000gn/T/tmp.kuKuqUEQz8/img/chuan.png">    </p:cNvPr>
           <p:cNvPicPr>
             <a:picLocks noChangeAspect="1"/>
           </p:cNvPicPr>
@@ -19633,7 +19633,7 @@
       </p:sp>
       <p:pic>
         <p:nvPicPr>
-          <p:cNvPr id="10" name="Image 0" descr="/var/folders/6c/210dcgxn4gz5sm71vld2cy1h0000gn/T/tmp.LHO6BoqOp1/img/ranhou.png">    </p:cNvPr>
+          <p:cNvPr id="10" name="Image 0" descr="/var/folders/6c/210dcgxn4gz5sm71vld2cy1h0000gn/T/tmp.kuKuqUEQz8/img/ranhou.png">    </p:cNvPr>
           <p:cNvPicPr>
             <a:picLocks noChangeAspect="1"/>
           </p:cNvPicPr>
